--- a/docs/KBS_Robotic_Arm_CCP_Presentation.pptx
+++ b/docs/KBS_Robotic_Arm_CCP_Presentation.pptx
@@ -1,29 +1,27 @@
 
-<file path=ppt/presentation.xml><?xml version="1.0" encoding="utf-8"?>
-<p:presentation xmlns:p="http://schemas.openxmlformats.org/presentationml/2006/main">
-  <p:sldMasterIdLst>
-    <p:sldMasterId xmlns:r="http://schemas.openxmlformats.org/officeDocument/2006/relationships" id="2147483648" r:id="Ra0df703eee944dac"/>
-  </p:sldMasterIdLst>
-  <p:notesMasterIdLst>
-    <p:notesMasterId xmlns:r="http://schemas.openxmlformats.org/officeDocument/2006/relationships" r:id="Rbffaf0bd8c0d469f"/>
-  </p:notesMasterIdLst>
-  <p:sldIdLst>
-    <p:sldId xmlns:r="http://schemas.openxmlformats.org/officeDocument/2006/relationships" id="256" r:id="R2dc4a740d65347f6"/>
-    <p:sldId xmlns:r="http://schemas.openxmlformats.org/officeDocument/2006/relationships" id="257" r:id="R3d190246f1824b14"/>
-    <p:sldId xmlns:r="http://schemas.openxmlformats.org/officeDocument/2006/relationships" id="258" r:id="R37de18bb10a54390"/>
-    <p:sldId xmlns:r="http://schemas.openxmlformats.org/officeDocument/2006/relationships" id="259" r:id="R63a06be91c714164"/>
-    <p:sldId xmlns:r="http://schemas.openxmlformats.org/officeDocument/2006/relationships" id="260" r:id="Rf33bd5b414ac46c8"/>
-    <p:sldId xmlns:r="http://schemas.openxmlformats.org/officeDocument/2006/relationships" id="261" r:id="R5387c472fc1f49ae"/>
-    <p:sldId xmlns:r="http://schemas.openxmlformats.org/officeDocument/2006/relationships" id="262" r:id="Re663bb9a5ca64c02"/>
-    <p:sldId xmlns:r="http://schemas.openxmlformats.org/officeDocument/2006/relationships" id="263" r:id="Reeb04931be214448"/>
-    <p:sldId xmlns:r="http://schemas.openxmlformats.org/officeDocument/2006/relationships" id="264" r:id="Rc80945cfba5a490b"/>
-  </p:sldIdLst>
-  <p:sldSz cx="12192000" cy="6858000"/>
-  <p:notesSz cx="6858000" cy="9144000"/>
-</p:presentation>
+<file path=docProps\app.xml><?xml version="1.0" encoding="utf-8"?>
+<ap:Properties xmlns:ap="http://schemas.openxmlformats.org/officeDocument/2006/extended-properties">
+  <ap:Application>Walnut Exporter</ap:Application>
+  <ap:PresentationFormat>Converted Presentation</ap:PresentationFormat>
+  <ap:Slides>0</ap:Slides>
+  <ap:Notes>0</ap:Notes>
+  <ap:HiddenSlides>0</ap:HiddenSlides>
+  <ap:SharedDoc>false</ap:SharedDoc>
+  <ap:DocSecurity>0</ap:DocSecurity>
+</ap:Properties>
 </file>
 
-<file path=ppt/notesMasters/notesMaster1.xml><?xml version="1.0" encoding="utf-8"?>
+<file path=docProps\core.xml><?xml version="1.0" encoding="utf-8"?>
+<coreProperties xmlns:dc="http://purl.org/dc/elements/1.1/" xmlns:dcterms="http://purl.org/dc/terms/" xmlns:xsi="http://www.w3.org/2001/XMLSchema-instance" xmlns="http://schemas.openxmlformats.org/package/2006/metadata/core-properties">
+  <dc:creator>Walnut Exporter</dc:creator>
+  <lastModifiedBy>Walnut Exporter</lastModifiedBy>
+  <dc:title>Presentation</dc:title>
+  <dcterms:created xsi:type="dcterms:W3CDTF">2026-10-23T10:27:51.6510000Z</dcterms:created>
+  <dcterms:modified xsi:type="dcterms:W3CDTF">2026-10-23T10:27:51.6510000Z</dcterms:modified>
+</coreProperties>
+</file>
+
+<file path=ppt\notesMasters\notesMaster1.xml><?xml version="1.0" encoding="utf-8"?>
 <p:notesMaster xmlns:p="http://schemas.openxmlformats.org/presentationml/2006/main">
   <p:cSld>
     <p:bg>
@@ -165,7 +163,7 @@
 </p:notesMaster>
 </file>
 
-<file path=ppt/notesMasters/theme/theme3.xml><?xml version="1.0" encoding="utf-8"?>
+<file path=ppt\notesMasters\theme\theme3.xml><?xml version="1.0" encoding="utf-8"?>
 <a:theme xmlns:a="http://schemas.openxmlformats.org/drawingml/2006/main" name="ChatGPT">
   <a:themeElements>
     <a:clrScheme name="ChatGPT">
@@ -410,7 +408,7 @@
 </a:theme>
 </file>
 
-<file path=ppt/notesSlides/notesSlide1.xml><?xml version="1.0" encoding="utf-8"?>
+<file path=ppt\notesSlides\notesSlide1.xml><?xml version="1.0" encoding="utf-8"?>
 <p:notes xmlns:p="http://schemas.openxmlformats.org/presentationml/2006/main">
   <p:cSld>
     <p:spTree>
@@ -480,7 +478,7 @@
 </p:notes>
 </file>
 
-<file path=ppt/notesSlides/notesSlide2.xml><?xml version="1.0" encoding="utf-8"?>
+<file path=ppt\notesSlides\notesSlide2.xml><?xml version="1.0" encoding="utf-8"?>
 <p:notes xmlns:p="http://schemas.openxmlformats.org/presentationml/2006/main">
   <p:cSld>
     <p:spTree>
@@ -546,7 +544,7 @@
 </p:notes>
 </file>
 
-<file path=ppt/notesSlides/notesSlide3.xml><?xml version="1.0" encoding="utf-8"?>
+<file path=ppt\notesSlides\notesSlide3.xml><?xml version="1.0" encoding="utf-8"?>
 <p:notes xmlns:p="http://schemas.openxmlformats.org/presentationml/2006/main">
   <p:cSld>
     <p:spTree>
@@ -612,7 +610,7 @@
 </p:notes>
 </file>
 
-<file path=ppt/notesSlides/notesSlide4.xml><?xml version="1.0" encoding="utf-8"?>
+<file path=ppt\notesSlides\notesSlide4.xml><?xml version="1.0" encoding="utf-8"?>
 <p:notes xmlns:p="http://schemas.openxmlformats.org/presentationml/2006/main">
   <p:cSld>
     <p:spTree>
@@ -682,7 +680,7 @@
 </p:notes>
 </file>
 
-<file path=ppt/notesSlides/notesSlide5.xml><?xml version="1.0" encoding="utf-8"?>
+<file path=ppt\notesSlides\notesSlide5.xml><?xml version="1.0" encoding="utf-8"?>
 <p:notes xmlns:p="http://schemas.openxmlformats.org/presentationml/2006/main">
   <p:cSld>
     <p:spTree>
@@ -748,7 +746,7 @@
 </p:notes>
 </file>
 
-<file path=ppt/notesSlides/notesSlide6.xml><?xml version="1.0" encoding="utf-8"?>
+<file path=ppt\notesSlides\notesSlide6.xml><?xml version="1.0" encoding="utf-8"?>
 <p:notes xmlns:p="http://schemas.openxmlformats.org/presentationml/2006/main">
   <p:cSld>
     <p:spTree>
@@ -814,7 +812,7 @@
 </p:notes>
 </file>
 
-<file path=ppt/notesSlides/notesSlide7.xml><?xml version="1.0" encoding="utf-8"?>
+<file path=ppt\notesSlides\notesSlide7.xml><?xml version="1.0" encoding="utf-8"?>
 <p:notes xmlns:p="http://schemas.openxmlformats.org/presentationml/2006/main">
   <p:cSld>
     <p:spTree>
@@ -884,7 +882,7 @@
 </p:notes>
 </file>
 
-<file path=ppt/notesSlides/notesSlide8.xml><?xml version="1.0" encoding="utf-8"?>
+<file path=ppt\notesSlides\notesSlide8.xml><?xml version="1.0" encoding="utf-8"?>
 <p:notes xmlns:p="http://schemas.openxmlformats.org/presentationml/2006/main">
   <p:cSld>
     <p:spTree>
@@ -954,7 +952,7 @@
 </p:notes>
 </file>
 
-<file path=ppt/notesSlides/notesSlide9.xml><?xml version="1.0" encoding="utf-8"?>
+<file path=ppt\notesSlides\notesSlide9.xml><?xml version="1.0" encoding="utf-8"?>
 <p:notes xmlns:p="http://schemas.openxmlformats.org/presentationml/2006/main">
   <p:cSld>
     <p:spTree>
@@ -1020,7 +1018,47 @@
 </p:notes>
 </file>
 
-<file path=ppt/slideLayouts/slideLayout1.xml><?xml version="1.0" encoding="utf-8"?>
+<file path=ppt\presProps.xml><?xml version="1.0" encoding="utf-8"?>
+<p:presentationPr xmlns:p="http://schemas.openxmlformats.org/presentationml/2006/main">
+  <p:extLst>
+    <p:ext xmlns:p14="http://schemas.microsoft.com/office/powerpoint/2010/main" uri="{E76CE94A-603C-4142-B9EB-6D1370010A27}">
+      <p14:discardImageEditData val="0"/>
+    </p:ext>
+    <p:ext xmlns:p14="http://schemas.microsoft.com/office/powerpoint/2010/main" uri="{D31A062A-798A-4329-ABDD-BBA856620510}">
+      <p14:defaultImageDpi val="32767"/>
+    </p:ext>
+    <p:ext xmlns:p15="http://schemas.microsoft.com/office/powerpoint/2012/main" uri="{FD5EFAAD-0ECE-453E-9831-46B23BE46B34}">
+      <p15:chartTrackingRefBased val="1"/>
+    </p:ext>
+  </p:extLst>
+</p:presentationPr>
+</file>
+
+<file path=ppt\presentation.xml><?xml version="1.0" encoding="utf-8"?>
+<p:presentation xmlns:p="http://schemas.openxmlformats.org/presentationml/2006/main">
+  <p:sldMasterIdLst>
+    <p:sldMasterId xmlns:r="http://schemas.openxmlformats.org/officeDocument/2006/relationships" id="2147483648" r:id="Ra0df703eee944dac"/>
+  </p:sldMasterIdLst>
+  <p:notesMasterIdLst>
+    <p:notesMasterId xmlns:r="http://schemas.openxmlformats.org/officeDocument/2006/relationships" r:id="Rbffaf0bd8c0d469f"/>
+  </p:notesMasterIdLst>
+  <p:sldIdLst>
+    <p:sldId xmlns:r="http://schemas.openxmlformats.org/officeDocument/2006/relationships" id="256" r:id="R2dc4a740d65347f6"/>
+    <p:sldId xmlns:r="http://schemas.openxmlformats.org/officeDocument/2006/relationships" id="257" r:id="R3d190246f1824b14"/>
+    <p:sldId xmlns:r="http://schemas.openxmlformats.org/officeDocument/2006/relationships" id="258" r:id="R37de18bb10a54390"/>
+    <p:sldId xmlns:r="http://schemas.openxmlformats.org/officeDocument/2006/relationships" id="259" r:id="R63a06be91c714164"/>
+    <p:sldId xmlns:r="http://schemas.openxmlformats.org/officeDocument/2006/relationships" id="260" r:id="Rf33bd5b414ac46c8"/>
+    <p:sldId xmlns:r="http://schemas.openxmlformats.org/officeDocument/2006/relationships" id="261" r:id="R5387c472fc1f49ae"/>
+    <p:sldId xmlns:r="http://schemas.openxmlformats.org/officeDocument/2006/relationships" id="262" r:id="Re663bb9a5ca64c02"/>
+    <p:sldId xmlns:r="http://schemas.openxmlformats.org/officeDocument/2006/relationships" id="263" r:id="Reeb04931be214448"/>
+    <p:sldId xmlns:r="http://schemas.openxmlformats.org/officeDocument/2006/relationships" id="264" r:id="Rc80945cfba5a490b"/>
+  </p:sldIdLst>
+  <p:sldSz cx="12192000" cy="6858000"/>
+  <p:notesSz cx="6858000" cy="9144000"/>
+</p:presentation>
+</file>
+
+<file path=ppt\slideLayouts\slideLayout1.xml><?xml version="1.0" encoding="utf-8"?>
 <p:sldLayout xmlns:p="http://schemas.openxmlformats.org/presentationml/2006/main" type="title">
   <p:cSld name="Title Slide">
     <p:spTree>
@@ -1495,7 +1533,7 @@
 </p:sldLayout>
 </file>
 
-<file path=ppt/slideLayouts/slideLayout2.xml><?xml version="1.0" encoding="utf-8"?>
+<file path=ppt\slideLayouts\slideLayout2.xml><?xml version="1.0" encoding="utf-8"?>
 <p:sldLayout xmlns:p="http://schemas.openxmlformats.org/presentationml/2006/main">
   <p:cSld name="Section Header">
     <p:spTree>
@@ -1741,7 +1779,7 @@
 </p:sldLayout>
 </file>
 
-<file path=ppt/slideLayouts/slideLayout3.xml><?xml version="1.0" encoding="utf-8"?>
+<file path=ppt\slideLayouts\slideLayout3.xml><?xml version="1.0" encoding="utf-8"?>
 <p:sldLayout xmlns:p="http://schemas.openxmlformats.org/presentationml/2006/main">
   <p:cSld name="Title and Body">
     <p:spTree>
@@ -2216,7 +2254,7 @@
 </p:sldLayout>
 </file>
 
-<file path=ppt/slideLayouts/slideLayout4.xml><?xml version="1.0" encoding="utf-8"?>
+<file path=ppt\slideLayouts\slideLayout4.xml><?xml version="1.0" encoding="utf-8"?>
 <p:sldLayout xmlns:p="http://schemas.openxmlformats.org/presentationml/2006/main">
   <p:cSld name="Title and Two Column">
     <p:spTree>
@@ -2920,7 +2958,7 @@
 </p:sldLayout>
 </file>
 
-<file path=ppt/slideLayouts/slideLayout5.xml><?xml version="1.0" encoding="utf-8"?>
+<file path=ppt\slideLayouts\slideLayout5.xml><?xml version="1.0" encoding="utf-8"?>
 <p:sldLayout xmlns:p="http://schemas.openxmlformats.org/presentationml/2006/main">
   <p:cSld name="Title and One Column">
     <p:spTree>
@@ -3395,7 +3433,7 @@
 </p:sldLayout>
 </file>
 
-<file path=ppt/slideLayouts/slideLayout6.xml><?xml version="1.0" encoding="utf-8"?>
+<file path=ppt\slideLayouts\slideLayout6.xml><?xml version="1.0" encoding="utf-8"?>
 <p:sldLayout xmlns:p="http://schemas.openxmlformats.org/presentationml/2006/main" type="blank">
   <p:cSld name="Blank">
     <p:spTree>
@@ -3412,7 +3450,7 @@
 </p:sldLayout>
 </file>
 
-<file path=ppt/slideMasters/slideMaster1.xml><?xml version="1.0" encoding="utf-8"?>
+<file path=ppt\slideMasters\slideMaster1.xml><?xml version="1.0" encoding="utf-8"?>
 <p:sldMaster xmlns:p="http://schemas.openxmlformats.org/presentationml/2006/main">
   <p:cSld name="Master">
     <p:bg>
@@ -3720,7 +3758,7 @@
 </p:sldMaster>
 </file>
 
-<file path=ppt/slideMasters/theme/theme2.xml><?xml version="1.0" encoding="utf-8"?>
+<file path=ppt\slideMasters\theme\theme2.xml><?xml version="1.0" encoding="utf-8"?>
 <a:theme xmlns:a="http://schemas.openxmlformats.org/drawingml/2006/main" name="ChatGPT">
   <a:themeElements>
     <a:clrScheme name="ChatGPT">
@@ -3965,7 +4003,7 @@
 </a:theme>
 </file>
 
-<file path=ppt/slides/slide1.xml><?xml version="1.0" encoding="utf-8"?>
+<file path=ppt\slides\slide1.xml><?xml version="1.0" encoding="utf-8"?>
 <p:sld xmlns:p="http://schemas.openxmlformats.org/presentationml/2006/main">
   <p:cSld>
     <p:bg>
@@ -4645,7 +4683,7 @@
 </p:sld>
 </file>
 
-<file path=ppt/slides/slide2.xml><?xml version="1.0" encoding="utf-8"?>
+<file path=ppt\slides\slide2.xml><?xml version="1.0" encoding="utf-8"?>
 <p:sld xmlns:p="http://schemas.openxmlformats.org/presentationml/2006/main">
   <p:cSld>
     <p:bg>
@@ -5773,7 +5811,7 @@
 </p:sld>
 </file>
 
-<file path=ppt/slides/slide3.xml><?xml version="1.0" encoding="utf-8"?>
+<file path=ppt\slides\slide3.xml><?xml version="1.0" encoding="utf-8"?>
 <p:sld xmlns:p="http://schemas.openxmlformats.org/presentationml/2006/main">
   <p:cSld>
     <p:bg>
@@ -7395,7 +7433,7 @@
 </p:sld>
 </file>
 
-<file path=ppt/slides/slide4.xml><?xml version="1.0" encoding="utf-8"?>
+<file path=ppt\slides\slide4.xml><?xml version="1.0" encoding="utf-8"?>
 <p:sld xmlns:p="http://schemas.openxmlformats.org/presentationml/2006/main">
   <p:cSld>
     <p:bg>
@@ -9017,7 +9055,7 @@
 </p:sld>
 </file>
 
-<file path=ppt/slides/slide5.xml><?xml version="1.0" encoding="utf-8"?>
+<file path=ppt\slides\slide5.xml><?xml version="1.0" encoding="utf-8"?>
 <p:sld xmlns:p="http://schemas.openxmlformats.org/presentationml/2006/main">
   <p:cSld>
     <p:bg>
@@ -10459,7 +10497,7 @@
 </p:sld>
 </file>
 
-<file path=ppt/slides/slide6.xml><?xml version="1.0" encoding="utf-8"?>
+<file path=ppt\slides\slide6.xml><?xml version="1.0" encoding="utf-8"?>
 <p:sld xmlns:p="http://schemas.openxmlformats.org/presentationml/2006/main">
   <p:cSld>
     <p:bg>
@@ -11744,7 +11782,7 @@
 </p:sld>
 </file>
 
-<file path=ppt/slides/slide7.xml><?xml version="1.0" encoding="utf-8"?>
+<file path=ppt\slides\slide7.xml><?xml version="1.0" encoding="utf-8"?>
 <p:sld xmlns:p="http://schemas.openxmlformats.org/presentationml/2006/main">
   <p:cSld>
     <p:bg>
@@ -12072,7 +12110,7 @@
                 <a:ea typeface="DejaVu Sans"/>
                 <a:cs typeface="DejaVu Sans"/>
               </a:rPr>
-              <a:t>Dataset and verification</a:t>
+              <a:t>Authentic dataset + ETL</a:t>
             </a:r>
           </a:p>
         </p:txBody>
@@ -12386,7 +12424,7 @@
                 <a:ea typeface="DejaVu Sans"/>
                 <a:cs typeface="DejaVu Sans"/>
               </a:rPr>
-              <a:t>13</a:t>
+              <a:t>463</a:t>
             </a:r>
           </a:p>
         </p:txBody>
@@ -12543,7 +12581,7 @@
                 <a:ea typeface="DejaVu Sans"/>
                 <a:cs typeface="DejaVu Sans"/>
               </a:rPr>
-              <a:t>synthetic scenarios</a:t>
+              <a:t>UCI robot failure episodes</a:t>
             </a:r>
           </a:p>
         </p:txBody>
@@ -12700,7 +12738,7 @@
                 <a:ea typeface="DejaVu Sans"/>
                 <a:cs typeface="DejaVu Sans"/>
               </a:rPr>
-              <a:t>8</a:t>
+              <a:t>451</a:t>
             </a:r>
           </a:p>
         </p:txBody>
@@ -12857,7 +12895,7 @@
                 <a:ea typeface="DejaVu Sans"/>
                 <a:cs typeface="DejaVu Sans"/>
               </a:rPr>
-              <a:t>inference checks</a:t>
+              <a:t>sensor rows kept after ETL</a:t>
             </a:r>
           </a:p>
         </p:txBody>
@@ -13014,7 +13052,7 @@
                 <a:ea typeface="DejaVu Sans"/>
                 <a:cs typeface="DejaVu Sans"/>
               </a:rPr>
-              <a:t>9</a:t>
+              <a:t>13</a:t>
             </a:r>
           </a:p>
         </p:txBody>
@@ -13171,7 +13209,7 @@
                 <a:ea typeface="DejaVu Sans"/>
                 <a:cs typeface="DejaVu Sans"/>
               </a:rPr>
-              <a:t>storage validation checks</a:t>
+              <a:t>evaluation scenarios PASS</a:t>
             </a:r>
           </a:p>
         </p:txBody>
@@ -13328,7 +13366,7 @@
                 <a:ea typeface="DejaVu Sans"/>
                 <a:cs typeface="DejaVu Sans"/>
               </a:rPr>
-              <a:t>Plus 7 evidence tests for source-claim validation and conflict resolution.</a:t>
+              <a:t>UCI DOI 10.24432/C5M89N - clean outliers/duplicates - map failure_class to KB - batch predict on Dataset &amp; ETL page.</a:t>
             </a:r>
           </a:p>
         </p:txBody>
@@ -13343,7 +13381,7 @@
 </p:sld>
 </file>
 
-<file path=ppt/slides/slide8.xml><?xml version="1.0" encoding="utf-8"?>
+<file path=ppt\slides\slide8.xml><?xml version="1.0" encoding="utf-8"?>
 <p:sld xmlns:p="http://schemas.openxmlformats.org/presentationml/2006/main">
   <p:cSld>
     <p:bg>
@@ -14628,7 +14666,7 @@
 </p:sld>
 </file>
 
-<file path=ppt/slides/slide9.xml><?xml version="1.0" encoding="utf-8"?>
+<file path=ppt\slides\slide9.xml><?xml version="1.0" encoding="utf-8"?>
 <p:sld xmlns:p="http://schemas.openxmlformats.org/presentationml/2006/main">
   <p:cSld>
     <p:bg>
@@ -15270,7 +15308,7 @@
                 <a:ea typeface="DejaVu Sans"/>
                 <a:cs typeface="DejaVu Sans"/>
               </a:rPr>
-              <a:t>1   Load the payload scenario and open the rule trace</a:t>
+              <a:t>1   Dataset &amp; ETL: cite UCI, show cleaning, batch predict</a:t>
             </a:r>
           </a:p>
         </p:txBody>
@@ -15427,7 +15465,7 @@
                 <a:ea typeface="DejaVu Sans"/>
                 <a:cs typeface="DejaVu Sans"/>
               </a:rPr>
-              <a:t>2   Save the case and compare it with another investigation</a:t>
+              <a:t>2   Load payload scenario and open the rule trace</a:t>
             </a:r>
           </a:p>
         </p:txBody>
@@ -15741,7 +15779,7 @@
                 <a:ea typeface="DejaVu Sans"/>
                 <a:cs typeface="DejaVu Sans"/>
               </a:rPr>
-              <a:t>4   Create a maintenance task and run the test suite</a:t>
+              <a:t>4   Evaluation lab 13/13 - optional Supabase sync</a:t>
             </a:r>
           </a:p>
         </p:txBody>
@@ -15898,7 +15936,7 @@
                 <a:ea typeface="DejaVu Sans"/>
                 <a:cs typeface="DejaVu Sans"/>
               </a:rPr>
-              <a:t>Close with the scope: transparent software behavior on synthetic data.</a:t>
+              <a:t>Close: authentic UCI dataset + explainable rules; eval cases are synthetic regression, not certified plant accuracy.</a:t>
             </a:r>
           </a:p>
         </p:txBody>
@@ -15913,7 +15951,11 @@
 </p:sld>
 </file>
 
-<file path=ppt/theme/theme1.xml><?xml version="1.0" encoding="utf-8"?>
+<file path=ppt\tableStyles.xml><?xml version="1.0" encoding="utf-8"?>
+<a:tblStyleLst xmlns:a="http://schemas.openxmlformats.org/drawingml/2006/main" def="{5C22544A-7EE6-4342-B048-85BDC9FD1C3A}"/>
+</file>
+
+<file path=ppt\theme\theme1.xml><?xml version="1.0" encoding="utf-8"?>
 <a:theme xmlns:a="http://schemas.openxmlformats.org/drawingml/2006/main" name="ChatGPT">
   <a:themeElements>
     <a:clrScheme name="ChatGPT">
